--- a/poster/nus-tree-poster-current.pptx
+++ b/poster/nus-tree-poster-current.pptx
@@ -2,13 +2,13 @@
 <file path=ppt/presentation.xml><?xml version="1.0" encoding="utf-8"?>
 <p:presentation xmlns:p="http://schemas.openxmlformats.org/presentationml/2006/main">
   <p:sldMasterIdLst>
-    <p:sldMasterId xmlns:r="http://schemas.openxmlformats.org/officeDocument/2006/relationships" id="2147483648" r:id="R0c1a4f22b14f4182"/>
+    <p:sldMasterId xmlns:r="http://schemas.openxmlformats.org/officeDocument/2006/relationships" id="2147483648" r:id="R8ddcc48fa6e4460b"/>
   </p:sldMasterIdLst>
   <p:notesMasterIdLst>
-    <p:notesMasterId xmlns:r="http://schemas.openxmlformats.org/officeDocument/2006/relationships" r:id="Rf24144150cdf463f"/>
+    <p:notesMasterId xmlns:r="http://schemas.openxmlformats.org/officeDocument/2006/relationships" r:id="Raf60c465e34e4172"/>
   </p:notesMasterIdLst>
   <p:sldIdLst>
-    <p:sldId xmlns:r="http://schemas.openxmlformats.org/officeDocument/2006/relationships" id="256" r:id="Rda5ff2a782104e40"/>
+    <p:sldId xmlns:r="http://schemas.openxmlformats.org/officeDocument/2006/relationships" id="256" r:id="Re74c62af1cbc42be"/>
   </p:sldIdLst>
   <p:sldSz cx="22707600" cy="32099250"/>
   <p:notesSz cx="6858000" cy="9144000"/>
@@ -506,7 +506,7 @@
   </p:cSld>
   <p:clrMap bg1="lt1" tx1="dk1" bg2="lt2" tx2="dk2" accent1="accent1" accent2="accent2" accent3="accent3" accent4="accent4" accent5="accent5" accent6="accent6" hlink="hlink" folHlink="folHlink"/>
   <p:sldLayoutIdLst>
-    <p:sldLayoutId xmlns:r="http://schemas.openxmlformats.org/officeDocument/2006/relationships" id="2147483649" r:id="R43ab8f61336e4e0f"/>
+    <p:sldLayoutId xmlns:r="http://schemas.openxmlformats.org/officeDocument/2006/relationships" id="2147483649" r:id="R36b031d519084c17"/>
   </p:sldLayoutIdLst>
   <p:txStyles>
     <p:titleStyle>
@@ -1061,13 +1061,13 @@
           <p:nvPr/>
         </p:nvPicPr>
         <p:blipFill>
-          <a:blip xmlns:r="http://schemas.openxmlformats.org/officeDocument/2006/relationships" xmlns:a="http://schemas.openxmlformats.org/drawingml/2006/main" r:embed="R1d57eb9e57624271"/>
+          <a:blip xmlns:r="http://schemas.openxmlformats.org/officeDocument/2006/relationships" xmlns:a="http://schemas.openxmlformats.org/drawingml/2006/main" r:embed="Rec6572d0aeea4855"/>
           <a:stretch xmlns:a="http://schemas.openxmlformats.org/drawingml/2006/main"/>
         </p:blipFill>
         <p:spPr>
           <a:xfrm xmlns:a="http://schemas.openxmlformats.org/drawingml/2006/main">
-            <a:off x="0" y="0"/>
-            <a:ext cx="22707600" cy="32099250"/>
+            <a:off x="18571" y="0"/>
+            <a:ext cx="22670459" cy="32099250"/>
           </a:xfrm>
           <a:prstGeom xmlns:a="http://schemas.openxmlformats.org/drawingml/2006/main" prst="rect">
             <a:avLst/>
@@ -1077,7 +1077,7 @@
     </p:spTree>
     <p:extLst>
       <p:ext uri="{BB962C8B-B14F-4D97-AF65-F5344CB8AC3E}">
-        <p14:creationId xmlns:p14="http://schemas.microsoft.com/office/powerpoint/2010/main" val="1901173074"/>
+        <p14:creationId xmlns:p14="http://schemas.microsoft.com/office/powerpoint/2010/main" val="1250322385"/>
       </p:ext>
     </p:extLst>
   </p:cSld>
